--- a/src/srstudio/assets/poster_templates/legacy/models/SEGUNDA_DA_LIMPEZA_2_PRECOS_COM_LIMITE.pptx
+++ b/src/srstudio/assets/poster_templates/legacy/models/SEGUNDA_DA_LIMPEZA_2_PRECOS_COM_LIMITE.pptx
@@ -3318,7 +3318,7 @@
 </file>
 
 <file path=ppt/slides/slide1.xml><?xml version="1.0" encoding="utf-8"?>
-<p:sld xmlns:a="http://schemas.openxmlformats.org/drawingml/2006/main" xmlns:r="http://schemas.openxmlformats.org/officeDocument/2006/relationships" xmlns:p="http://schemas.openxmlformats.org/presentationml/2006/main">
+<p:sld xmlns:a="http://schemas.openxmlformats.org/drawingml/2006/main" xmlns:r="http://schemas.openxmlformats.org/officeDocument/2006/relationships" xmlns:p="http://schemas.openxmlformats.org/presentationml/2006/main" showMasterSp="1">
   <p:cSld>
     <p:spTree>
       <p:nvGrpSpPr>
@@ -3344,13 +3344,13 @@
             </a:extLst>
           </p:cNvPr>
           <p:cNvSpPr>
-            <a:spLocks noChangeArrowheads="1" noChangeShapeType="1"/>
+            <a:spLocks noChangeArrowheads="1" noChangeShapeType="1" noTextEdit="1"/>
           </p:cNvSpPr>
           <p:nvPr/>
         </p:nvSpPr>
         <p:spPr bwMode="auto">
           <a:xfrm>
-            <a:off x="485558" y="1511815"/>
+            <a:off x="537423" y="1840030"/>
             <a:ext cx="4405745" cy="1367003"/>
           </a:xfrm>
           <a:prstGeom prst="rect">
@@ -3418,7 +3418,7 @@
         </p:nvSpPr>
         <p:spPr bwMode="auto">
           <a:xfrm>
-            <a:off x="213024" y="3069416"/>
+            <a:off x="264889" y="3397631"/>
             <a:ext cx="561806" cy="248864"/>
           </a:xfrm>
           <a:prstGeom prst="rect">
@@ -3463,13 +3463,13 @@
             </a:extLst>
           </p:cNvPr>
           <p:cNvSpPr>
-            <a:spLocks noChangeArrowheads="1" noChangeShapeType="1"/>
+            <a:spLocks noChangeArrowheads="1" noChangeShapeType="1" noTextEdit="1"/>
           </p:cNvSpPr>
           <p:nvPr/>
         </p:nvSpPr>
         <p:spPr bwMode="auto">
           <a:xfrm>
-            <a:off x="76491" y="3453427"/>
+            <a:off x="128356" y="3781642"/>
             <a:ext cx="768834" cy="366742"/>
           </a:xfrm>
           <a:prstGeom prst="rect">
@@ -3514,13 +3514,13 @@
             </a:extLst>
           </p:cNvPr>
           <p:cNvSpPr>
-            <a:spLocks noChangeArrowheads="1" noChangeShapeType="1"/>
+            <a:spLocks noChangeArrowheads="1" noChangeShapeType="1" noTextEdit="1"/>
           </p:cNvSpPr>
           <p:nvPr/>
         </p:nvSpPr>
         <p:spPr bwMode="auto">
           <a:xfrm>
-            <a:off x="973289" y="2926350"/>
+            <a:off x="1025154" y="3254565"/>
             <a:ext cx="3685798" cy="910413"/>
           </a:xfrm>
           <a:prstGeom prst="rect">
@@ -3617,7 +3617,7 @@
           <p:nvPr/>
         </p:nvPicPr>
         <p:blipFill>
-          <a:blip r:embed="rId2">
+          <a:blip r:embed="rIdReference2">
             <a:extLst>
               <a:ext uri="{28A0092B-C50C-407E-A947-70E740481C1C}">
                 <a14:useLocalDpi xmlns:a14="http://schemas.microsoft.com/office/drawing/2010/main" val="0"/>
@@ -3631,7 +3631,7 @@
         </p:blipFill>
         <p:spPr bwMode="auto">
           <a:xfrm>
-            <a:off x="4165514" y="6118384"/>
+            <a:off x="5924812" y="6416362"/>
             <a:ext cx="1145512" cy="751111"/>
           </a:xfrm>
           <a:prstGeom prst="rect">
@@ -3715,57 +3715,6 @@
       </p:sp>
       <p:sp>
         <p:nvSpPr>
-          <p:cNvPr id="24" name="WordArt 4">
-            <a:extLst>
-              <a:ext uri="{FF2B5EF4-FFF2-40B4-BE49-F238E27FC236}">
-                <a16:creationId xmlns:a16="http://schemas.microsoft.com/office/drawing/2014/main" id="{E8DEEAE6-C9E7-FBCF-BBD5-032AE254EB02}"/>
-              </a:ext>
-            </a:extLst>
-          </p:cNvPr>
-          <p:cNvSpPr>
-            <a:spLocks noChangeArrowheads="1" noChangeShapeType="1" noTextEdit="1"/>
-          </p:cNvSpPr>
-          <p:nvPr/>
-        </p:nvSpPr>
-        <p:spPr bwMode="auto">
-          <a:xfrm>
-            <a:off x="714431" y="222164"/>
-            <a:ext cx="3944656" cy="821984"/>
-          </a:xfrm>
-          <a:prstGeom prst="rect">
-            <a:avLst/>
-          </a:prstGeom>
-        </p:spPr>
-        <p:txBody>
-          <a:bodyPr wrap="none" fromWordArt="1">
-            <a:prstTxWarp prst="textPlain">
-              <a:avLst>
-                <a:gd name="adj" fmla="val 50000"/>
-              </a:avLst>
-            </a:prstTxWarp>
-          </a:bodyPr>
-          <a:lstStyle/>
-          <a:p>
-            <a:pPr algn="ctr"/>
-            <a:r>
-              <a:rPr lang="pt-BR" sz="3616" kern="10" dirty="0">
-                <a:ln w="9525">
-                  <a:solidFill>
-                    <a:schemeClr val="tx1"/>
-                  </a:solidFill>
-                  <a:round/>
-                  <a:headEnd/>
-                  <a:tailEnd/>
-                </a:ln>
-                <a:latin typeface="Algerian" panose="04020705040A02060702" pitchFamily="82" charset="0"/>
-              </a:rPr>
-              <a:t>OFERTA</a:t>
-            </a:r>
-          </a:p>
-        </p:txBody>
-      </p:sp>
-      <p:sp>
-        <p:nvSpPr>
           <p:cNvPr id="9" name="WordArt 6">
             <a:extLst>
               <a:ext uri="{FF2B5EF4-FFF2-40B4-BE49-F238E27FC236}">
@@ -3780,7 +3729,7 @@
         </p:nvSpPr>
         <p:spPr bwMode="auto">
           <a:xfrm>
-            <a:off x="165522" y="4409912"/>
+            <a:off x="217387" y="4738127"/>
             <a:ext cx="590773" cy="366742"/>
           </a:xfrm>
           <a:prstGeom prst="rect">
@@ -3825,13 +3774,13 @@
             </a:extLst>
           </p:cNvPr>
           <p:cNvSpPr>
-            <a:spLocks noChangeArrowheads="1" noChangeShapeType="1"/>
+            <a:spLocks noChangeArrowheads="1" noChangeShapeType="1" noTextEdit="1"/>
           </p:cNvSpPr>
           <p:nvPr/>
         </p:nvSpPr>
         <p:spPr bwMode="auto">
           <a:xfrm>
-            <a:off x="52570" y="5208750"/>
+            <a:off x="104435" y="5536965"/>
             <a:ext cx="768834" cy="366742"/>
           </a:xfrm>
           <a:prstGeom prst="rect">
@@ -3882,7 +3831,7 @@
         </p:nvCxnSpPr>
         <p:spPr>
           <a:xfrm>
-            <a:off x="913790" y="6133210"/>
+            <a:off x="910785" y="6245857"/>
             <a:ext cx="0" cy="758260"/>
           </a:xfrm>
           <a:prstGeom prst="line">
@@ -3920,7 +3869,7 @@
           <p:nvPr/>
         </p:nvPicPr>
         <p:blipFill>
-          <a:blip r:embed="rId3">
+          <a:blip r:embed="rIdReference1">
             <a:extLst>
               <a:ext uri="{28A0092B-C50C-407E-A947-70E740481C1C}">
                 <a14:useLocalDpi xmlns:a14="http://schemas.microsoft.com/office/drawing/2010/main" val="0"/>
@@ -3934,7 +3883,7 @@
         </p:blipFill>
         <p:spPr bwMode="auto">
           <a:xfrm>
-            <a:off x="0" y="3950114"/>
+            <a:off x="51865" y="4278329"/>
             <a:ext cx="5400675" cy="246561"/>
           </a:xfrm>
           <a:prstGeom prst="rect">
@@ -3979,7 +3928,7 @@
         </p:nvSpPr>
         <p:spPr>
           <a:xfrm>
-            <a:off x="1891169" y="4189651"/>
+            <a:off x="1774151" y="4517866"/>
             <a:ext cx="1956101" cy="220261"/>
           </a:xfrm>
           <a:prstGeom prst="rect">
@@ -4024,13 +3973,13 @@
             </a:extLst>
           </p:cNvPr>
           <p:cNvSpPr>
-            <a:spLocks noChangeArrowheads="1" noChangeShapeType="1"/>
+            <a:spLocks noChangeArrowheads="1" noChangeShapeType="1" noTextEdit="1"/>
           </p:cNvSpPr>
           <p:nvPr/>
         </p:nvSpPr>
         <p:spPr bwMode="auto">
           <a:xfrm>
-            <a:off x="945797" y="4460255"/>
+            <a:off x="997662" y="4788470"/>
             <a:ext cx="3846847" cy="1283753"/>
           </a:xfrm>
           <a:prstGeom prst="rect">
@@ -4049,7 +3998,7 @@
           <a:p>
             <a:pPr algn="ctr"/>
             <a:r>
-              <a:rPr lang="pt-BR" sz="3616" kern="10">
+              <a:rPr lang="pt-BR" sz="3616" kern="10" dirty="0">
                 <a:ln w="9525">
                   <a:solidFill>
                     <a:schemeClr val="tx1"/>
@@ -4062,17 +4011,6 @@
               </a:rPr>
               <a:t>89,64</a:t>
             </a:r>
-            <a:endParaRPr lang="pt-BR" sz="3616" kern="10" dirty="0">
-              <a:ln w="9525">
-                <a:solidFill>
-                  <a:schemeClr val="tx1"/>
-                </a:solidFill>
-                <a:round/>
-                <a:headEnd/>
-                <a:tailEnd/>
-              </a:ln>
-              <a:latin typeface="Algerian" panose="04020705040A02060702" pitchFamily="82" charset="0"/>
-            </a:endParaRPr>
           </a:p>
         </p:txBody>
       </p:sp>
@@ -4091,7 +4029,7 @@
           <p:nvPr/>
         </p:nvPicPr>
         <p:blipFill>
-          <a:blip r:embed="rId4">
+          <a:blip r:embed="rIdReference5">
             <a:extLst>
               <a:ext uri="{28A0092B-C50C-407E-A947-70E740481C1C}">
                 <a14:useLocalDpi xmlns:a14="http://schemas.microsoft.com/office/drawing/2010/main" val="0"/>
@@ -4105,7 +4043,7 @@
         </p:blipFill>
         <p:spPr>
           <a:xfrm>
-            <a:off x="123212" y="6133210"/>
+            <a:off x="120207" y="6245857"/>
             <a:ext cx="703702" cy="737306"/>
           </a:xfrm>
           <a:prstGeom prst="rect">
@@ -4128,14 +4066,14 @@
           <p:nvPr/>
         </p:nvPicPr>
         <p:blipFill>
-          <a:blip r:embed="rId5"/>
+          <a:blip r:embed="rIdReference4"/>
           <a:stretch>
             <a:fillRect/>
           </a:stretch>
         </p:blipFill>
         <p:spPr>
           <a:xfrm>
-            <a:off x="1000667" y="6186027"/>
+            <a:off x="997662" y="6298674"/>
             <a:ext cx="667160" cy="661095"/>
           </a:xfrm>
           <a:prstGeom prst="rect">
@@ -4153,13 +4091,13 @@
             </a:extLst>
           </p:cNvPr>
           <p:cNvSpPr>
-            <a:spLocks noChangeArrowheads="1" noChangeShapeType="1"/>
+            <a:spLocks noChangeArrowheads="1" noChangeShapeType="1" noTextEdit="1"/>
           </p:cNvSpPr>
           <p:nvPr/>
         </p:nvSpPr>
         <p:spPr bwMode="auto">
           <a:xfrm>
-            <a:off x="2192441" y="6247625"/>
+            <a:off x="2189436" y="6360272"/>
             <a:ext cx="1353560" cy="373783"/>
           </a:xfrm>
           <a:prstGeom prst="rect">
@@ -4221,13 +4159,13 @@
             </a:extLst>
           </p:cNvPr>
           <p:cNvSpPr>
-            <a:spLocks noChangeArrowheads="1" noChangeShapeType="1"/>
+            <a:spLocks noChangeArrowheads="1" noChangeShapeType="1" noTextEdit="1"/>
           </p:cNvSpPr>
           <p:nvPr/>
         </p:nvSpPr>
         <p:spPr bwMode="auto">
           <a:xfrm>
-            <a:off x="1764573" y="6007588"/>
+            <a:off x="1761568" y="6120235"/>
             <a:ext cx="2209296" cy="235136"/>
           </a:xfrm>
           <a:prstGeom prst="rect">
@@ -4278,7 +4216,7 @@
         </p:nvSpPr>
         <p:spPr bwMode="auto">
           <a:xfrm>
-            <a:off x="1824974" y="6626309"/>
+            <a:off x="1821969" y="6738956"/>
             <a:ext cx="2088495" cy="110407"/>
           </a:xfrm>
           <a:prstGeom prst="rect">
@@ -4329,7 +4267,7 @@
         </p:nvSpPr>
         <p:spPr bwMode="auto">
           <a:xfrm>
-            <a:off x="1824974" y="6736715"/>
+            <a:off x="1821969" y="6849362"/>
             <a:ext cx="2088495" cy="110407"/>
           </a:xfrm>
           <a:prstGeom prst="rect">
@@ -4364,43 +4302,6 @@
           </a:p>
         </p:txBody>
       </p:sp>
-      <p:cxnSp>
-        <p:nvCxnSpPr>
-          <p:cNvPr id="5" name="Conector reto 4">
-            <a:extLst>
-              <a:ext uri="{FF2B5EF4-FFF2-40B4-BE49-F238E27FC236}">
-                <a16:creationId xmlns:a16="http://schemas.microsoft.com/office/drawing/2014/main" id="{57895A34-4DAC-15CA-725F-98D11DBF27BC}"/>
-              </a:ext>
-            </a:extLst>
-          </p:cNvPr>
-          <p:cNvCxnSpPr/>
-          <p:nvPr/>
-        </p:nvCxnSpPr>
-        <p:spPr>
-          <a:xfrm>
-            <a:off x="714431" y="1044148"/>
-            <a:ext cx="4023839" cy="0"/>
-          </a:xfrm>
-          <a:prstGeom prst="line">
-            <a:avLst/>
-          </a:prstGeom>
-          <a:ln w="28575"/>
-        </p:spPr>
-        <p:style>
-          <a:lnRef idx="1">
-            <a:schemeClr val="dk1"/>
-          </a:lnRef>
-          <a:fillRef idx="0">
-            <a:schemeClr val="dk1"/>
-          </a:fillRef>
-          <a:effectRef idx="0">
-            <a:schemeClr val="dk1"/>
-          </a:effectRef>
-          <a:fontRef idx="minor">
-            <a:schemeClr val="tx1"/>
-          </a:fontRef>
-        </p:style>
-      </p:cxnSp>
     </p:spTree>
     <p:extLst>
       <p:ext uri="{BB962C8B-B14F-4D97-AF65-F5344CB8AC3E}">
